--- a/Projeto de Software e Segurança da Informação - 2026/Projeto de Software/Aula12-Spring Boot/Spring Boot.pptx
+++ b/Projeto de Software e Segurança da Informação - 2026/Projeto de Software/Aula12-Spring Boot/Spring Boot.pptx
@@ -5378,10 +5378,9 @@
               <a:t>beans</a:t>
             </a:r>
             <a:r>
-              <a:rPr lang="pt-BR"/>
+              <a:rPr lang="pt-BR" dirty="0"/>
               <a:t> personalizados, etc.</a:t>
             </a:r>
-            <a:endParaRPr lang="pt-BR" dirty="0"/>
           </a:p>
           <a:p>
             <a:pPr algn="just"/>
